--- a/demo/05_msd_amos_spleen/presentation/demo5_external_validation.pptx
+++ b/demo/05_msd_amos_spleen/presentation/demo5_external_validation.pptx
@@ -16,6 +16,7 @@
     <p:sldId id="264" r:id="rId16"/>
     <p:sldId id="265" r:id="rId17"/>
     <p:sldId id="266" r:id="rId18"/>
+    <p:sldId id="267" r:id="rId19"/>
   </p:sldIdLst>
   <p:sldSz cx="12191695" cy="6858000" type="screen4x3"/>
   <p:notesSz cx="6858000" cy="9144000"/>
@@ -622,6 +623,83 @@
 </file>
 
 <file path=ppt/notesSlides/notesSlide11.xml><?xml version="1.0" encoding="utf-8"?>
+<p:notes xmlns:a="http://schemas.openxmlformats.org/drawingml/2006/main" xmlns:p="http://schemas.openxmlformats.org/presentationml/2006/main" xmlns:r="http://schemas.openxmlformats.org/officeDocument/2006/relationships">
+  <p:cSld>
+    <p:spTree>
+      <p:nvGrpSpPr>
+        <p:cNvPr id="1" name=""/>
+        <p:cNvGrpSpPr/>
+        <p:nvPr/>
+      </p:nvGrpSpPr>
+      <p:grpSpPr>
+        <a:xfrm>
+          <a:off x="0" y="0"/>
+          <a:ext cx="0" cy="0"/>
+          <a:chOff x="0" y="0"/>
+          <a:chExt cx="0" cy="0"/>
+        </a:xfrm>
+      </p:grpSpPr>
+      <p:sp>
+        <p:nvSpPr>
+          <p:cNvPr id="2" name="Slide Image Placeholder 1"/>
+          <p:cNvSpPr>
+            <a:spLocks noGrp="1"/>
+          </p:cNvSpPr>
+          <p:nvPr>
+            <p:ph type="sldImg" idx="2"/>
+          </p:nvPr>
+        </p:nvSpPr>
+        <p:spPr/>
+      </p:sp>
+      <p:sp>
+        <p:nvSpPr>
+          <p:cNvPr id="3" name="Notes Placeholder 2"/>
+          <p:cNvSpPr>
+            <a:spLocks noGrp="1"/>
+          </p:cNvSpPr>
+          <p:nvPr>
+            <p:ph type="body" idx="3" sz="quarter"/>
+          </p:nvPr>
+        </p:nvSpPr>
+        <p:spPr/>
+        <p:txBody>
+          <a:bodyPr/>
+          <a:lstStyle/>
+          <a:p>
+            <a:r>
+              <a:rPr sz="1300" b="0" i="0">
+                <a:solidFill>
+                  <a:srgbClr val="21252B"/>
+                </a:solidFill>
+                <a:latin typeface="Inter"/>
+                <a:ea typeface="Pretendard"/>
+              </a:rPr>
+              <a:t>대조군입니다. 강도 스케일 하나만 바꿨고 재학습은 없습니다. Dice가 0.015에서 0.302로 스무 배 올랐지만 CT의 0.893에는 한참 못 미칩니다. 즉 원래 붕괴의 상당 부분은 전처리 계약 탓이었고, 나머지는 진짜 표현 전이 실패입니다. 예측은 실행 전에 적어뒀습니다.</a:t>
+            </a:r>
+          </a:p>
+        </p:txBody>
+      </p:sp>
+      <p:sp>
+        <p:nvSpPr>
+          <p:cNvPr id="4" name="Slide Number Placeholder 3"/>
+          <p:cNvSpPr>
+            <a:spLocks noGrp="1"/>
+          </p:cNvSpPr>
+          <p:nvPr>
+            <p:ph type="sldNum" idx="5" sz="quarter"/>
+          </p:nvPr>
+        </p:nvSpPr>
+        <p:spPr/>
+      </p:sp>
+    </p:spTree>
+  </p:cSld>
+  <p:clrMapOvr>
+    <a:masterClrMapping/>
+  </p:clrMapOvr>
+</p:notes>
+</file>
+
+<file path=ppt/notesSlides/notesSlide12.xml><?xml version="1.0" encoding="utf-8"?>
 <p:notes xmlns:a="http://schemas.openxmlformats.org/drawingml/2006/main" xmlns:p="http://schemas.openxmlformats.org/presentationml/2006/main" xmlns:r="http://schemas.openxmlformats.org/officeDocument/2006/relationships">
   <p:cSld>
     <p:spTree>
@@ -4770,8 +4848,8 @@
         </p:nvSpPr>
         <p:spPr>
           <a:xfrm>
-            <a:off x="640080" y="292608"/>
-            <a:ext cx="7315200" cy="365760"/>
+            <a:off x="640080" y="685800"/>
+            <a:ext cx="10972800" cy="1005840"/>
           </a:xfrm>
           <a:prstGeom prst="rect">
             <a:avLst/>
@@ -4779,68 +4857,38 @@
           <a:noFill/>
         </p:spPr>
         <p:txBody>
-          <a:bodyPr wrap="none">
+          <a:bodyPr wrap="square">
             <a:spAutoFit/>
           </a:bodyPr>
           <a:lstStyle/>
           <a:p>
-            <a:r>
-              <a:rPr sz="1100" b="1" i="0" spc="400">
-                <a:solidFill>
-                  <a:srgbClr val="B83E3A"/>
-                </a:solidFill>
-                <a:latin typeface="Inter"/>
-                <a:ea typeface="Pretendard"/>
-              </a:rPr>
-              <a:t>CONCLUSION</a:t>
-            </a:r>
-          </a:p>
-        </p:txBody>
-      </p:sp>
-      <p:sp>
-        <p:nvSpPr>
-          <p:cNvPr id="3" name="TextBox 2"/>
-          <p:cNvSpPr txBox="1"/>
-          <p:nvPr/>
-        </p:nvSpPr>
-        <p:spPr>
-          <a:xfrm>
-            <a:off x="640080" y="685800"/>
-            <a:ext cx="10972800" cy="822960"/>
-          </a:xfrm>
-          <a:prstGeom prst="rect">
-            <a:avLst/>
-          </a:prstGeom>
-          <a:noFill/>
-        </p:spPr>
-        <p:txBody>
-          <a:bodyPr wrap="none">
-            <a:spAutoFit/>
-          </a:bodyPr>
-          <a:lstStyle/>
-          <a:p>
-            <a:r>
-              <a:rPr sz="3200" b="1" i="0">
+            <a:pPr algn="l">
+              <a:spcAft>
+                <a:spcPts val="300"/>
+              </a:spcAft>
+            </a:pPr>
+            <a:r>
+              <a:rPr sz="3000" b="1" i="0">
                 <a:solidFill>
                   <a:srgbClr val="1B2A4E"/>
                 </a:solidFill>
                 <a:latin typeface="Inter"/>
                 <a:ea typeface="Pretendard"/>
               </a:rPr>
-              <a:t>What this establishes, and what it does not</a:t>
+              <a:t>Change only the input scale, and a fifth of the loss comes back</a:t>
             </a:r>
           </a:p>
         </p:txBody>
       </p:sp>
       <p:cxnSp>
         <p:nvCxnSpPr>
-          <p:cNvPr id="4" name="Connector 3"/>
+          <p:cNvPr id="3" name="Connector 2"/>
           <p:cNvCxnSpPr/>
           <p:nvPr/>
         </p:nvCxnSpPr>
         <p:spPr>
           <a:xfrm>
-            <a:off x="640080" y="1600200"/>
+            <a:off x="640080" y="1883664"/>
             <a:ext cx="548639" cy="0"/>
           </a:xfrm>
           <a:prstGeom prst="line">
@@ -4869,6 +4917,272 @@
       </p:cxnSp>
       <p:sp>
         <p:nvSpPr>
+          <p:cNvPr id="4" name="TextBox 3"/>
+          <p:cNvSpPr txBox="1"/>
+          <p:nvPr/>
+        </p:nvSpPr>
+        <p:spPr>
+          <a:xfrm>
+            <a:off x="640080" y="2194560"/>
+            <a:ext cx="10972800" cy="4206240"/>
+          </a:xfrm>
+          <a:prstGeom prst="rect">
+            <a:avLst/>
+          </a:prstGeom>
+          <a:noFill/>
+        </p:spPr>
+        <p:txBody>
+          <a:bodyPr wrap="square">
+            <a:spAutoFit/>
+          </a:bodyPr>
+          <a:lstStyle/>
+          <a:p>
+            <a:pPr algn="l">
+              <a:lnSpc>
+                <a:spcPct val="125000"/>
+              </a:lnSpc>
+              <a:spcAft>
+                <a:spcPts val="1000"/>
+              </a:spcAft>
+            </a:pPr>
+            <a:r>
+              <a:rPr sz="1400" b="1" i="0">
+                <a:solidFill>
+                  <a:srgbClr val="B83E3A"/>
+                </a:solidFill>
+                <a:latin typeface="Inter"/>
+                <a:ea typeface="Pretendard"/>
+              </a:rPr>
+              <a:t>▪  </a:t>
+            </a:r>
+            <a:r>
+              <a:rPr sz="2000" b="1" i="0">
+                <a:solidFill>
+                  <a:srgbClr val="21252B"/>
+                </a:solidFill>
+                <a:latin typeface="Inter"/>
+                <a:ea typeface="Pretendard"/>
+              </a:rPr>
+              <a:t>0.0152 → 0.3016</a:t>
+            </a:r>
+            <a:r>
+              <a:rPr sz="2000" b="0" i="0">
+                <a:solidFill>
+                  <a:srgbClr val="21252B"/>
+                </a:solidFill>
+                <a:latin typeface="Inter"/>
+                <a:ea typeface="Pretendard"/>
+              </a:rPr>
+              <a:t> — no retraining, same checkpoint</a:t>
+            </a:r>
+          </a:p>
+          <a:p>
+            <a:pPr algn="l" lvl="1">
+              <a:lnSpc>
+                <a:spcPct val="125000"/>
+              </a:lnSpc>
+              <a:spcAft>
+                <a:spcPts val="1000"/>
+              </a:spcAft>
+            </a:pPr>
+            <a:r>
+              <a:rPr sz="1500" b="0" i="0">
+                <a:solidFill>
+                  <a:srgbClr val="8A929E"/>
+                </a:solidFill>
+                <a:latin typeface="Inter"/>
+                <a:ea typeface="Pretendard"/>
+              </a:rPr>
+              <a:t>— </a:t>
+            </a:r>
+            <a:r>
+              <a:rPr sz="1600" b="0" i="0">
+                <a:solidFill>
+                  <a:srgbClr val="4A525C"/>
+                </a:solidFill>
+                <a:latin typeface="Inter"/>
+                <a:ea typeface="Pretendard"/>
+              </a:rPr>
+              <a:t>vs as-shipped MRI: </a:t>
+            </a:r>
+            <a:r>
+              <a:rPr sz="1600" b="1" i="0">
+                <a:solidFill>
+                  <a:srgbClr val="4A525C"/>
+                </a:solidFill>
+                <a:latin typeface="Inter"/>
+                <a:ea typeface="Pretendard"/>
+              </a:rPr>
+              <a:t>-0.6579</a:t>
+            </a:r>
+            <a:r>
+              <a:rPr sz="1600" b="0" i="0">
+                <a:solidFill>
+                  <a:srgbClr val="4A525C"/>
+                </a:solidFill>
+                <a:latin typeface="Inter"/>
+                <a:ea typeface="Pretendard"/>
+              </a:rPr>
+              <a:t> below internal</a:t>
+            </a:r>
+          </a:p>
+          <a:p>
+            <a:pPr algn="l">
+              <a:lnSpc>
+                <a:spcPct val="125000"/>
+              </a:lnSpc>
+              <a:spcAft>
+                <a:spcPts val="1000"/>
+              </a:spcAft>
+            </a:pPr>
+            <a:r>
+              <a:rPr sz="1400" b="1" i="0">
+                <a:solidFill>
+                  <a:srgbClr val="B83E3A"/>
+                </a:solidFill>
+                <a:latin typeface="Inter"/>
+                <a:ea typeface="Pretendard"/>
+              </a:rPr>
+              <a:t>▪  </a:t>
+            </a:r>
+            <a:r>
+              <a:rPr sz="2000" b="1" i="0">
+                <a:solidFill>
+                  <a:srgbClr val="21252B"/>
+                </a:solidFill>
+                <a:latin typeface="Inter"/>
+                <a:ea typeface="Pretendard"/>
+              </a:rPr>
+              <a:t>Still far below CT: both mechanisms are real, and unequal.</a:t>
+            </a:r>
+          </a:p>
+        </p:txBody>
+      </p:sp>
+    </p:spTree>
+  </p:cSld>
+  <p:clrMapOvr>
+    <a:masterClrMapping/>
+  </p:clrMapOvr>
+</p:sld>
+</file>
+
+<file path=ppt/slides/slide12.xml><?xml version="1.0" encoding="utf-8"?>
+<p:sld xmlns:a="http://schemas.openxmlformats.org/drawingml/2006/main" xmlns:p="http://schemas.openxmlformats.org/presentationml/2006/main" xmlns:r="http://schemas.openxmlformats.org/officeDocument/2006/relationships">
+  <p:cSld>
+    <p:spTree>
+      <p:nvGrpSpPr>
+        <p:cNvPr id="1" name=""/>
+        <p:cNvGrpSpPr/>
+        <p:nvPr/>
+      </p:nvGrpSpPr>
+      <p:grpSpPr/>
+      <p:sp>
+        <p:nvSpPr>
+          <p:cNvPr id="2" name="TextBox 1"/>
+          <p:cNvSpPr txBox="1"/>
+          <p:nvPr/>
+        </p:nvSpPr>
+        <p:spPr>
+          <a:xfrm>
+            <a:off x="640080" y="292608"/>
+            <a:ext cx="7315200" cy="365760"/>
+          </a:xfrm>
+          <a:prstGeom prst="rect">
+            <a:avLst/>
+          </a:prstGeom>
+          <a:noFill/>
+        </p:spPr>
+        <p:txBody>
+          <a:bodyPr wrap="none">
+            <a:spAutoFit/>
+          </a:bodyPr>
+          <a:lstStyle/>
+          <a:p>
+            <a:r>
+              <a:rPr sz="1100" b="1" i="0" spc="400">
+                <a:solidFill>
+                  <a:srgbClr val="B83E3A"/>
+                </a:solidFill>
+                <a:latin typeface="Inter"/>
+                <a:ea typeface="Pretendard"/>
+              </a:rPr>
+              <a:t>CONCLUSION</a:t>
+            </a:r>
+          </a:p>
+        </p:txBody>
+      </p:sp>
+      <p:sp>
+        <p:nvSpPr>
+          <p:cNvPr id="3" name="TextBox 2"/>
+          <p:cNvSpPr txBox="1"/>
+          <p:nvPr/>
+        </p:nvSpPr>
+        <p:spPr>
+          <a:xfrm>
+            <a:off x="640080" y="685800"/>
+            <a:ext cx="10972800" cy="822960"/>
+          </a:xfrm>
+          <a:prstGeom prst="rect">
+            <a:avLst/>
+          </a:prstGeom>
+          <a:noFill/>
+        </p:spPr>
+        <p:txBody>
+          <a:bodyPr wrap="none">
+            <a:spAutoFit/>
+          </a:bodyPr>
+          <a:lstStyle/>
+          <a:p>
+            <a:r>
+              <a:rPr sz="3200" b="1" i="0">
+                <a:solidFill>
+                  <a:srgbClr val="1B2A4E"/>
+                </a:solidFill>
+                <a:latin typeface="Inter"/>
+                <a:ea typeface="Pretendard"/>
+              </a:rPr>
+              <a:t>What this establishes, and what it does not</a:t>
+            </a:r>
+          </a:p>
+        </p:txBody>
+      </p:sp>
+      <p:cxnSp>
+        <p:nvCxnSpPr>
+          <p:cNvPr id="4" name="Connector 3"/>
+          <p:cNvCxnSpPr/>
+          <p:nvPr/>
+        </p:nvCxnSpPr>
+        <p:spPr>
+          <a:xfrm>
+            <a:off x="640080" y="1600200"/>
+            <a:ext cx="548639" cy="0"/>
+          </a:xfrm>
+          <a:prstGeom prst="line">
+            <a:avLst/>
+          </a:prstGeom>
+          <a:ln w="31750">
+            <a:solidFill>
+              <a:srgbClr val="B83E3A"/>
+            </a:solidFill>
+          </a:ln>
+        </p:spPr>
+        <p:style>
+          <a:lnRef idx="2">
+            <a:schemeClr val="accent1"/>
+          </a:lnRef>
+          <a:fillRef idx="0">
+            <a:schemeClr val="accent1"/>
+          </a:fillRef>
+          <a:effectRef idx="1">
+            <a:schemeClr val="accent1"/>
+          </a:effectRef>
+          <a:fontRef idx="minor">
+            <a:schemeClr val="tx1"/>
+          </a:fontRef>
+        </p:style>
+      </p:cxnSp>
+      <p:sp>
+        <p:nvSpPr>
           <p:cNvPr id="5" name="TextBox 4"/>
           <p:cNvSpPr txBox="1"/>
           <p:nvPr/>
@@ -4955,7 +5269,7 @@
                 <a:latin typeface="Inter"/>
                 <a:ea typeface="Pretendard"/>
               </a:rPr>
-              <a:t>Does not:</a:t>
+              <a:t>Measured:</a:t>
             </a:r>
             <a:r>
               <a:rPr sz="2200" b="0" i="0">
@@ -4965,7 +5279,7 @@
                 <a:latin typeface="Inter"/>
                 <a:ea typeface="Pretendard"/>
               </a:rPr>
-              <a:t> separate preprocessing from representation failure</a:t>
+              <a:t> ~0.29 Dice preprocessing, ~0.59 representation</a:t>
             </a:r>
           </a:p>
           <a:p>
@@ -5035,7 +5349,7 @@
                 <a:latin typeface="Inter"/>
                 <a:ea typeface="Pretendard"/>
               </a:rPr>
-              <a:t>Next:</a:t>
+              <a:t>Open:</a:t>
             </a:r>
             <a:r>
               <a:rPr sz="2200" b="0" i="0">
@@ -5045,7 +5359,7 @@
                 <a:latin typeface="Inter"/>
                 <a:ea typeface="Pretendard"/>
               </a:rPr>
-              <a:t> one inference pass, no retraining</a:t>
+              <a:t> a volume-wise z-score is a different counterfactual</a:t>
             </a:r>
           </a:p>
         </p:txBody>
@@ -5888,8 +6202,8 @@
         </p:nvSpPr>
         <p:spPr>
           <a:xfrm>
-            <a:off x="7278624" y="2823429"/>
-            <a:ext cx="4572000" cy="2509588"/>
+            <a:off x="7278624" y="2581163"/>
+            <a:ext cx="4572000" cy="2994121"/>
           </a:xfrm>
           <a:prstGeom prst="rect">
             <a:avLst/>
@@ -5939,8 +6253,8 @@
         </p:blipFill>
         <p:spPr>
           <a:xfrm>
-            <a:off x="7223760" y="2768565"/>
-            <a:ext cx="4572000" cy="2509588"/>
+            <a:off x="7223760" y="2526299"/>
+            <a:ext cx="4572000" cy="2994121"/>
           </a:xfrm>
           <a:prstGeom prst="rect">
             <a:avLst/>
@@ -5960,7 +6274,7 @@
         </p:nvSpPr>
         <p:spPr>
           <a:xfrm>
-            <a:off x="7223760" y="5369594"/>
+            <a:off x="7223760" y="5611860"/>
             <a:ext cx="4572000" cy="548640"/>
           </a:xfrm>
           <a:prstGeom prst="rect">
@@ -6252,8 +6566,8 @@
         </p:nvSpPr>
         <p:spPr>
           <a:xfrm>
-            <a:off x="7278624" y="2769945"/>
-            <a:ext cx="4572000" cy="2616557"/>
+            <a:off x="7278624" y="2985426"/>
+            <a:ext cx="4572000" cy="2185595"/>
           </a:xfrm>
           <a:prstGeom prst="rect">
             <a:avLst/>
@@ -6303,8 +6617,8 @@
         </p:blipFill>
         <p:spPr>
           <a:xfrm>
-            <a:off x="7223760" y="2715081"/>
-            <a:ext cx="4572000" cy="2616557"/>
+            <a:off x="7223760" y="2930562"/>
+            <a:ext cx="4572000" cy="2185595"/>
           </a:xfrm>
           <a:prstGeom prst="rect">
             <a:avLst/>

--- a/demo/05_msd_amos_spleen/presentation/demo5_external_validation.pptx
+++ b/demo/05_msd_amos_spleen/presentation/demo5_external_validation.pptx
@@ -674,7 +674,7 @@
                 <a:latin typeface="Inter"/>
                 <a:ea typeface="Pretendard"/>
               </a:rPr>
-              <a:t>대조군입니다. 강도 스케일 하나만 바꿨고 재학습은 없습니다. Dice가 0.015에서 0.302로 스무 배 올랐지만 CT의 0.893에는 한참 못 미칩니다. 즉 원래 붕괴의 상당 부분은 전처리 계약 탓이었고, 나머지는 진짜 표현 전이 실패입니다. 예측은 실행 전에 적어뒀습니다.</a:t>
+              <a:t>대조군 두 개입니다. 하나는 잘못된 정규화기를 두고 입력을 고쳤고, 다른 하나는 입력을 두고 정규화기를 바꿨습니다. 둘 다 재학습 없이 0.29 부근에 도달했고 차이의 구간이 0을 포함합니다. 케이스별 상관은 0.94 — 같은 영상에서 성공하고 같은 영상에서 실패합니다. 즉 중요한 건 데이터가 학습된 강도 도메인에 도달하느냐 하나뿐입니다. 두 예측 모두 실행 전에 적었고, 두 번째는 방향이 틀렸습니다.</a:t>
             </a:r>
           </a:p>
         </p:txBody>
@@ -4875,7 +4875,7 @@
                 <a:latin typeface="Inter"/>
                 <a:ea typeface="Pretendard"/>
               </a:rPr>
-              <a:t>Change only the input scale, and a fifth of the loss comes back</a:t>
+              <a:t>Two different repairs recover the same third of the loss</a:t>
             </a:r>
           </a:p>
         </p:txBody>
@@ -5003,7 +5003,7 @@
                 <a:latin typeface="Inter"/>
                 <a:ea typeface="Pretendard"/>
               </a:rPr>
-              <a:t>vs as-shipped MRI: </a:t>
+              <a:t>A second arm swaps the </a:t>
             </a:r>
             <a:r>
               <a:rPr sz="1600" b="1" i="0">
@@ -5013,7 +5013,7 @@
                 <a:latin typeface="Inter"/>
                 <a:ea typeface="Pretendard"/>
               </a:rPr>
-              <a:t>-0.6579</a:t>
+              <a:t>normaliser</a:t>
             </a:r>
             <a:r>
               <a:rPr sz="1600" b="0" i="0">
@@ -5023,7 +5023,17 @@
                 <a:latin typeface="Inter"/>
                 <a:ea typeface="Pretendard"/>
               </a:rPr>
-              <a:t> below internal</a:t>
+              <a:t> instead: </a:t>
+            </a:r>
+            <a:r>
+              <a:rPr sz="1600" b="1" i="0">
+                <a:solidFill>
+                  <a:srgbClr val="4A525C"/>
+                </a:solidFill>
+                <a:latin typeface="Inter"/>
+                <a:ea typeface="Pretendard"/>
+              </a:rPr>
+              <a:t>0.2870</a:t>
             </a:r>
           </a:p>
           <a:p>
@@ -5053,7 +5063,7 @@
                 <a:latin typeface="Inter"/>
                 <a:ea typeface="Pretendard"/>
               </a:rPr>
-              <a:t>Still far below CT: both mechanisms are real, and unequal.</a:t>
+              <a:t>Two unrelated repairs, same place — the domain is the story.</a:t>
             </a:r>
           </a:p>
         </p:txBody>
@@ -5279,7 +5289,7 @@
                 <a:latin typeface="Inter"/>
                 <a:ea typeface="Pretendard"/>
               </a:rPr>
-              <a:t> ~0.29 Dice preprocessing, ~0.59 representation</a:t>
+              <a:t> ~0.28 Dice intensity domain, ~0.60 representation</a:t>
             </a:r>
           </a:p>
           <a:p>
@@ -5359,7 +5369,27 @@
                 <a:latin typeface="Inter"/>
                 <a:ea typeface="Pretendard"/>
               </a:rPr>
-              <a:t> a volume-wise z-score is a different counterfactual</a:t>
+              <a:t> what a model </a:t>
+            </a:r>
+            <a:r>
+              <a:rPr sz="2200" b="0" i="1">
+                <a:solidFill>
+                  <a:srgbClr val="21252B"/>
+                </a:solidFill>
+                <a:latin typeface="Inter"/>
+                <a:ea typeface="Pretendard"/>
+              </a:rPr>
+              <a:t>trained</a:t>
+            </a:r>
+            <a:r>
+              <a:rPr sz="2200" b="0" i="0">
+                <a:solidFill>
+                  <a:srgbClr val="21252B"/>
+                </a:solidFill>
+                <a:latin typeface="Inter"/>
+                <a:ea typeface="Pretendard"/>
+              </a:rPr>
+              <a:t> on MR would do</a:t>
             </a:r>
           </a:p>
         </p:txBody>
@@ -6202,8 +6232,8 @@
         </p:nvSpPr>
         <p:spPr>
           <a:xfrm>
-            <a:off x="7278624" y="2581163"/>
-            <a:ext cx="4572000" cy="2994121"/>
+            <a:off x="7278624" y="2336784"/>
+            <a:ext cx="4572000" cy="3482878"/>
           </a:xfrm>
           <a:prstGeom prst="rect">
             <a:avLst/>
@@ -6253,8 +6283,8 @@
         </p:blipFill>
         <p:spPr>
           <a:xfrm>
-            <a:off x="7223760" y="2526299"/>
-            <a:ext cx="4572000" cy="2994121"/>
+            <a:off x="7223760" y="2281920"/>
+            <a:ext cx="4572000" cy="3482878"/>
           </a:xfrm>
           <a:prstGeom prst="rect">
             <a:avLst/>
@@ -6274,7 +6304,7 @@
         </p:nvSpPr>
         <p:spPr>
           <a:xfrm>
-            <a:off x="7223760" y="5611860"/>
+            <a:off x="7223760" y="5856239"/>
             <a:ext cx="4572000" cy="548640"/>
           </a:xfrm>
           <a:prstGeom prst="rect">
@@ -6566,8 +6596,8 @@
         </p:nvSpPr>
         <p:spPr>
           <a:xfrm>
-            <a:off x="7278624" y="2985426"/>
-            <a:ext cx="4572000" cy="2185595"/>
+            <a:off x="7278624" y="3093781"/>
+            <a:ext cx="4572000" cy="1968884"/>
           </a:xfrm>
           <a:prstGeom prst="rect">
             <a:avLst/>
@@ -6617,8 +6647,8 @@
         </p:blipFill>
         <p:spPr>
           <a:xfrm>
-            <a:off x="7223760" y="2930562"/>
-            <a:ext cx="4572000" cy="2185595"/>
+            <a:off x="7223760" y="3038917"/>
+            <a:ext cx="4572000" cy="1968884"/>
           </a:xfrm>
           <a:prstGeom prst="rect">
             <a:avLst/>

--- a/demo/05_msd_amos_spleen/presentation/demo5_external_validation.pptx
+++ b/demo/05_msd_amos_spleen/presentation/demo5_external_validation.pptx
@@ -16,6 +16,7 @@
     <p:sldId id="264" r:id="rId16"/>
     <p:sldId id="265" r:id="rId17"/>
     <p:sldId id="266" r:id="rId18"/>
+    <p:sldId id="267" r:id="rId19"/>
   </p:sldIdLst>
   <p:sldSz cx="12191695" cy="6858000" type="screen4x3"/>
   <p:notesSz cx="6858000" cy="9144000"/>
@@ -622,6 +623,83 @@
 </file>
 
 <file path=ppt/notesSlides/notesSlide11.xml><?xml version="1.0" encoding="utf-8"?>
+<p:notes xmlns:a="http://schemas.openxmlformats.org/drawingml/2006/main" xmlns:p="http://schemas.openxmlformats.org/presentationml/2006/main" xmlns:r="http://schemas.openxmlformats.org/officeDocument/2006/relationships">
+  <p:cSld>
+    <p:spTree>
+      <p:nvGrpSpPr>
+        <p:cNvPr id="1" name=""/>
+        <p:cNvGrpSpPr/>
+        <p:nvPr/>
+      </p:nvGrpSpPr>
+      <p:grpSpPr>
+        <a:xfrm>
+          <a:off x="0" y="0"/>
+          <a:ext cx="0" cy="0"/>
+          <a:chOff x="0" y="0"/>
+          <a:chExt cx="0" cy="0"/>
+        </a:xfrm>
+      </p:grpSpPr>
+      <p:sp>
+        <p:nvSpPr>
+          <p:cNvPr id="2" name="Slide Image Placeholder 1"/>
+          <p:cNvSpPr>
+            <a:spLocks noGrp="1"/>
+          </p:cNvSpPr>
+          <p:nvPr>
+            <p:ph type="sldImg" idx="2"/>
+          </p:nvPr>
+        </p:nvSpPr>
+        <p:spPr/>
+      </p:sp>
+      <p:sp>
+        <p:nvSpPr>
+          <p:cNvPr id="3" name="Notes Placeholder 2"/>
+          <p:cNvSpPr>
+            <a:spLocks noGrp="1"/>
+          </p:cNvSpPr>
+          <p:nvPr>
+            <p:ph type="body" idx="3" sz="quarter"/>
+          </p:nvPr>
+        </p:nvSpPr>
+        <p:spPr/>
+        <p:txBody>
+          <a:bodyPr/>
+          <a:lstStyle/>
+          <a:p>
+            <a:r>
+              <a:rPr sz="1300" b="0" i="0">
+                <a:solidFill>
+                  <a:srgbClr val="21252B"/>
+                </a:solidFill>
+                <a:latin typeface="Inter"/>
+                <a:ea typeface="Pretendard"/>
+              </a:rPr>
+              <a:t>대조군 두 개입니다. 하나는 잘못된 정규화기를 두고 입력을 고쳤고, 다른 하나는 입력을 두고 정규화기를 바꿨습니다. 둘 다 재학습 없이 0.29 부근에 도달했고 차이의 구간이 0을 포함합니다. 케이스별 상관은 0.94 — 같은 영상에서 성공하고 같은 영상에서 실패합니다. 즉 중요한 건 데이터가 학습된 강도 도메인에 도달하느냐 하나뿐입니다. 두 예측 모두 실행 전에 적었고, 두 번째는 방향이 틀렸습니다.</a:t>
+            </a:r>
+          </a:p>
+        </p:txBody>
+      </p:sp>
+      <p:sp>
+        <p:nvSpPr>
+          <p:cNvPr id="4" name="Slide Number Placeholder 3"/>
+          <p:cNvSpPr>
+            <a:spLocks noGrp="1"/>
+          </p:cNvSpPr>
+          <p:nvPr>
+            <p:ph type="sldNum" idx="5" sz="quarter"/>
+          </p:nvPr>
+        </p:nvSpPr>
+        <p:spPr/>
+      </p:sp>
+    </p:spTree>
+  </p:cSld>
+  <p:clrMapOvr>
+    <a:masterClrMapping/>
+  </p:clrMapOvr>
+</p:notes>
+</file>
+
+<file path=ppt/notesSlides/notesSlide12.xml><?xml version="1.0" encoding="utf-8"?>
 <p:notes xmlns:a="http://schemas.openxmlformats.org/drawingml/2006/main" xmlns:p="http://schemas.openxmlformats.org/presentationml/2006/main" xmlns:r="http://schemas.openxmlformats.org/officeDocument/2006/relationships">
   <p:cSld>
     <p:spTree>
@@ -4770,8 +4848,8 @@
         </p:nvSpPr>
         <p:spPr>
           <a:xfrm>
-            <a:off x="640080" y="292608"/>
-            <a:ext cx="7315200" cy="365760"/>
+            <a:off x="640080" y="685800"/>
+            <a:ext cx="10972800" cy="1005840"/>
           </a:xfrm>
           <a:prstGeom prst="rect">
             <a:avLst/>
@@ -4779,68 +4857,38 @@
           <a:noFill/>
         </p:spPr>
         <p:txBody>
-          <a:bodyPr wrap="none">
+          <a:bodyPr wrap="square">
             <a:spAutoFit/>
           </a:bodyPr>
           <a:lstStyle/>
           <a:p>
-            <a:r>
-              <a:rPr sz="1100" b="1" i="0" spc="400">
-                <a:solidFill>
-                  <a:srgbClr val="B83E3A"/>
-                </a:solidFill>
-                <a:latin typeface="Inter"/>
-                <a:ea typeface="Pretendard"/>
-              </a:rPr>
-              <a:t>CONCLUSION</a:t>
-            </a:r>
-          </a:p>
-        </p:txBody>
-      </p:sp>
-      <p:sp>
-        <p:nvSpPr>
-          <p:cNvPr id="3" name="TextBox 2"/>
-          <p:cNvSpPr txBox="1"/>
-          <p:nvPr/>
-        </p:nvSpPr>
-        <p:spPr>
-          <a:xfrm>
-            <a:off x="640080" y="685800"/>
-            <a:ext cx="10972800" cy="822960"/>
-          </a:xfrm>
-          <a:prstGeom prst="rect">
-            <a:avLst/>
-          </a:prstGeom>
-          <a:noFill/>
-        </p:spPr>
-        <p:txBody>
-          <a:bodyPr wrap="none">
-            <a:spAutoFit/>
-          </a:bodyPr>
-          <a:lstStyle/>
-          <a:p>
-            <a:r>
-              <a:rPr sz="3200" b="1" i="0">
+            <a:pPr algn="l">
+              <a:spcAft>
+                <a:spcPts val="300"/>
+              </a:spcAft>
+            </a:pPr>
+            <a:r>
+              <a:rPr sz="3000" b="1" i="0">
                 <a:solidFill>
                   <a:srgbClr val="1B2A4E"/>
                 </a:solidFill>
                 <a:latin typeface="Inter"/>
                 <a:ea typeface="Pretendard"/>
               </a:rPr>
-              <a:t>What this establishes, and what it does not</a:t>
+              <a:t>Two different repairs recover the same third of the loss</a:t>
             </a:r>
           </a:p>
         </p:txBody>
       </p:sp>
       <p:cxnSp>
         <p:nvCxnSpPr>
-          <p:cNvPr id="4" name="Connector 3"/>
+          <p:cNvPr id="3" name="Connector 2"/>
           <p:cNvCxnSpPr/>
           <p:nvPr/>
         </p:nvCxnSpPr>
         <p:spPr>
           <a:xfrm>
-            <a:off x="640080" y="1600200"/>
+            <a:off x="640080" y="1883664"/>
             <a:ext cx="548639" cy="0"/>
           </a:xfrm>
           <a:prstGeom prst="line">
@@ -4869,6 +4917,282 @@
       </p:cxnSp>
       <p:sp>
         <p:nvSpPr>
+          <p:cNvPr id="4" name="TextBox 3"/>
+          <p:cNvSpPr txBox="1"/>
+          <p:nvPr/>
+        </p:nvSpPr>
+        <p:spPr>
+          <a:xfrm>
+            <a:off x="640080" y="2194560"/>
+            <a:ext cx="10972800" cy="4206240"/>
+          </a:xfrm>
+          <a:prstGeom prst="rect">
+            <a:avLst/>
+          </a:prstGeom>
+          <a:noFill/>
+        </p:spPr>
+        <p:txBody>
+          <a:bodyPr wrap="square">
+            <a:spAutoFit/>
+          </a:bodyPr>
+          <a:lstStyle/>
+          <a:p>
+            <a:pPr algn="l">
+              <a:lnSpc>
+                <a:spcPct val="125000"/>
+              </a:lnSpc>
+              <a:spcAft>
+                <a:spcPts val="1000"/>
+              </a:spcAft>
+            </a:pPr>
+            <a:r>
+              <a:rPr sz="1400" b="1" i="0">
+                <a:solidFill>
+                  <a:srgbClr val="B83E3A"/>
+                </a:solidFill>
+                <a:latin typeface="Inter"/>
+                <a:ea typeface="Pretendard"/>
+              </a:rPr>
+              <a:t>▪  </a:t>
+            </a:r>
+            <a:r>
+              <a:rPr sz="2000" b="1" i="0">
+                <a:solidFill>
+                  <a:srgbClr val="21252B"/>
+                </a:solidFill>
+                <a:latin typeface="Inter"/>
+                <a:ea typeface="Pretendard"/>
+              </a:rPr>
+              <a:t>0.0152 → 0.3016</a:t>
+            </a:r>
+            <a:r>
+              <a:rPr sz="2000" b="0" i="0">
+                <a:solidFill>
+                  <a:srgbClr val="21252B"/>
+                </a:solidFill>
+                <a:latin typeface="Inter"/>
+                <a:ea typeface="Pretendard"/>
+              </a:rPr>
+              <a:t> — no retraining, same checkpoint</a:t>
+            </a:r>
+          </a:p>
+          <a:p>
+            <a:pPr algn="l" lvl="1">
+              <a:lnSpc>
+                <a:spcPct val="125000"/>
+              </a:lnSpc>
+              <a:spcAft>
+                <a:spcPts val="1000"/>
+              </a:spcAft>
+            </a:pPr>
+            <a:r>
+              <a:rPr sz="1500" b="0" i="0">
+                <a:solidFill>
+                  <a:srgbClr val="8A929E"/>
+                </a:solidFill>
+                <a:latin typeface="Inter"/>
+                <a:ea typeface="Pretendard"/>
+              </a:rPr>
+              <a:t>— </a:t>
+            </a:r>
+            <a:r>
+              <a:rPr sz="1600" b="0" i="0">
+                <a:solidFill>
+                  <a:srgbClr val="4A525C"/>
+                </a:solidFill>
+                <a:latin typeface="Inter"/>
+                <a:ea typeface="Pretendard"/>
+              </a:rPr>
+              <a:t>A second arm swaps the </a:t>
+            </a:r>
+            <a:r>
+              <a:rPr sz="1600" b="1" i="0">
+                <a:solidFill>
+                  <a:srgbClr val="4A525C"/>
+                </a:solidFill>
+                <a:latin typeface="Inter"/>
+                <a:ea typeface="Pretendard"/>
+              </a:rPr>
+              <a:t>normaliser</a:t>
+            </a:r>
+            <a:r>
+              <a:rPr sz="1600" b="0" i="0">
+                <a:solidFill>
+                  <a:srgbClr val="4A525C"/>
+                </a:solidFill>
+                <a:latin typeface="Inter"/>
+                <a:ea typeface="Pretendard"/>
+              </a:rPr>
+              <a:t> instead: </a:t>
+            </a:r>
+            <a:r>
+              <a:rPr sz="1600" b="1" i="0">
+                <a:solidFill>
+                  <a:srgbClr val="4A525C"/>
+                </a:solidFill>
+                <a:latin typeface="Inter"/>
+                <a:ea typeface="Pretendard"/>
+              </a:rPr>
+              <a:t>0.2870</a:t>
+            </a:r>
+          </a:p>
+          <a:p>
+            <a:pPr algn="l">
+              <a:lnSpc>
+                <a:spcPct val="125000"/>
+              </a:lnSpc>
+              <a:spcAft>
+                <a:spcPts val="1000"/>
+              </a:spcAft>
+            </a:pPr>
+            <a:r>
+              <a:rPr sz="1400" b="1" i="0">
+                <a:solidFill>
+                  <a:srgbClr val="B83E3A"/>
+                </a:solidFill>
+                <a:latin typeface="Inter"/>
+                <a:ea typeface="Pretendard"/>
+              </a:rPr>
+              <a:t>▪  </a:t>
+            </a:r>
+            <a:r>
+              <a:rPr sz="2000" b="1" i="0">
+                <a:solidFill>
+                  <a:srgbClr val="21252B"/>
+                </a:solidFill>
+                <a:latin typeface="Inter"/>
+                <a:ea typeface="Pretendard"/>
+              </a:rPr>
+              <a:t>Two unrelated repairs, same place — the domain is the story.</a:t>
+            </a:r>
+          </a:p>
+        </p:txBody>
+      </p:sp>
+    </p:spTree>
+  </p:cSld>
+  <p:clrMapOvr>
+    <a:masterClrMapping/>
+  </p:clrMapOvr>
+</p:sld>
+</file>
+
+<file path=ppt/slides/slide12.xml><?xml version="1.0" encoding="utf-8"?>
+<p:sld xmlns:a="http://schemas.openxmlformats.org/drawingml/2006/main" xmlns:p="http://schemas.openxmlformats.org/presentationml/2006/main" xmlns:r="http://schemas.openxmlformats.org/officeDocument/2006/relationships">
+  <p:cSld>
+    <p:spTree>
+      <p:nvGrpSpPr>
+        <p:cNvPr id="1" name=""/>
+        <p:cNvGrpSpPr/>
+        <p:nvPr/>
+      </p:nvGrpSpPr>
+      <p:grpSpPr/>
+      <p:sp>
+        <p:nvSpPr>
+          <p:cNvPr id="2" name="TextBox 1"/>
+          <p:cNvSpPr txBox="1"/>
+          <p:nvPr/>
+        </p:nvSpPr>
+        <p:spPr>
+          <a:xfrm>
+            <a:off x="640080" y="292608"/>
+            <a:ext cx="7315200" cy="365760"/>
+          </a:xfrm>
+          <a:prstGeom prst="rect">
+            <a:avLst/>
+          </a:prstGeom>
+          <a:noFill/>
+        </p:spPr>
+        <p:txBody>
+          <a:bodyPr wrap="none">
+            <a:spAutoFit/>
+          </a:bodyPr>
+          <a:lstStyle/>
+          <a:p>
+            <a:r>
+              <a:rPr sz="1100" b="1" i="0" spc="400">
+                <a:solidFill>
+                  <a:srgbClr val="B83E3A"/>
+                </a:solidFill>
+                <a:latin typeface="Inter"/>
+                <a:ea typeface="Pretendard"/>
+              </a:rPr>
+              <a:t>CONCLUSION</a:t>
+            </a:r>
+          </a:p>
+        </p:txBody>
+      </p:sp>
+      <p:sp>
+        <p:nvSpPr>
+          <p:cNvPr id="3" name="TextBox 2"/>
+          <p:cNvSpPr txBox="1"/>
+          <p:nvPr/>
+        </p:nvSpPr>
+        <p:spPr>
+          <a:xfrm>
+            <a:off x="640080" y="685800"/>
+            <a:ext cx="10972800" cy="822960"/>
+          </a:xfrm>
+          <a:prstGeom prst="rect">
+            <a:avLst/>
+          </a:prstGeom>
+          <a:noFill/>
+        </p:spPr>
+        <p:txBody>
+          <a:bodyPr wrap="none">
+            <a:spAutoFit/>
+          </a:bodyPr>
+          <a:lstStyle/>
+          <a:p>
+            <a:r>
+              <a:rPr sz="3200" b="1" i="0">
+                <a:solidFill>
+                  <a:srgbClr val="1B2A4E"/>
+                </a:solidFill>
+                <a:latin typeface="Inter"/>
+                <a:ea typeface="Pretendard"/>
+              </a:rPr>
+              <a:t>What this establishes, and what it does not</a:t>
+            </a:r>
+          </a:p>
+        </p:txBody>
+      </p:sp>
+      <p:cxnSp>
+        <p:nvCxnSpPr>
+          <p:cNvPr id="4" name="Connector 3"/>
+          <p:cNvCxnSpPr/>
+          <p:nvPr/>
+        </p:nvCxnSpPr>
+        <p:spPr>
+          <a:xfrm>
+            <a:off x="640080" y="1600200"/>
+            <a:ext cx="548639" cy="0"/>
+          </a:xfrm>
+          <a:prstGeom prst="line">
+            <a:avLst/>
+          </a:prstGeom>
+          <a:ln w="31750">
+            <a:solidFill>
+              <a:srgbClr val="B83E3A"/>
+            </a:solidFill>
+          </a:ln>
+        </p:spPr>
+        <p:style>
+          <a:lnRef idx="2">
+            <a:schemeClr val="accent1"/>
+          </a:lnRef>
+          <a:fillRef idx="0">
+            <a:schemeClr val="accent1"/>
+          </a:fillRef>
+          <a:effectRef idx="1">
+            <a:schemeClr val="accent1"/>
+          </a:effectRef>
+          <a:fontRef idx="minor">
+            <a:schemeClr val="tx1"/>
+          </a:fontRef>
+        </p:style>
+      </p:cxnSp>
+      <p:sp>
+        <p:nvSpPr>
           <p:cNvPr id="5" name="TextBox 4"/>
           <p:cNvSpPr txBox="1"/>
           <p:nvPr/>
@@ -4955,7 +5279,7 @@
                 <a:latin typeface="Inter"/>
                 <a:ea typeface="Pretendard"/>
               </a:rPr>
-              <a:t>Does not:</a:t>
+              <a:t>Measured:</a:t>
             </a:r>
             <a:r>
               <a:rPr sz="2200" b="0" i="0">
@@ -4965,7 +5289,7 @@
                 <a:latin typeface="Inter"/>
                 <a:ea typeface="Pretendard"/>
               </a:rPr>
-              <a:t> separate preprocessing from representation failure</a:t>
+              <a:t> ~0.28 Dice intensity domain, ~0.60 representation</a:t>
             </a:r>
           </a:p>
           <a:p>
@@ -5035,7 +5359,7 @@
                 <a:latin typeface="Inter"/>
                 <a:ea typeface="Pretendard"/>
               </a:rPr>
-              <a:t>Next:</a:t>
+              <a:t>Open:</a:t>
             </a:r>
             <a:r>
               <a:rPr sz="2200" b="0" i="0">
@@ -5045,7 +5369,27 @@
                 <a:latin typeface="Inter"/>
                 <a:ea typeface="Pretendard"/>
               </a:rPr>
-              <a:t> one inference pass, no retraining</a:t>
+              <a:t> what a model </a:t>
+            </a:r>
+            <a:r>
+              <a:rPr sz="2200" b="0" i="1">
+                <a:solidFill>
+                  <a:srgbClr val="21252B"/>
+                </a:solidFill>
+                <a:latin typeface="Inter"/>
+                <a:ea typeface="Pretendard"/>
+              </a:rPr>
+              <a:t>trained</a:t>
+            </a:r>
+            <a:r>
+              <a:rPr sz="2200" b="0" i="0">
+                <a:solidFill>
+                  <a:srgbClr val="21252B"/>
+                </a:solidFill>
+                <a:latin typeface="Inter"/>
+                <a:ea typeface="Pretendard"/>
+              </a:rPr>
+              <a:t> on MR would do</a:t>
             </a:r>
           </a:p>
         </p:txBody>
@@ -5888,8 +6232,8 @@
         </p:nvSpPr>
         <p:spPr>
           <a:xfrm>
-            <a:off x="7278624" y="2823429"/>
-            <a:ext cx="4572000" cy="2509588"/>
+            <a:off x="7278624" y="2336784"/>
+            <a:ext cx="4572000" cy="3482878"/>
           </a:xfrm>
           <a:prstGeom prst="rect">
             <a:avLst/>
@@ -5939,8 +6283,8 @@
         </p:blipFill>
         <p:spPr>
           <a:xfrm>
-            <a:off x="7223760" y="2768565"/>
-            <a:ext cx="4572000" cy="2509588"/>
+            <a:off x="7223760" y="2281920"/>
+            <a:ext cx="4572000" cy="3482878"/>
           </a:xfrm>
           <a:prstGeom prst="rect">
             <a:avLst/>
@@ -5960,7 +6304,7 @@
         </p:nvSpPr>
         <p:spPr>
           <a:xfrm>
-            <a:off x="7223760" y="5369594"/>
+            <a:off x="7223760" y="5856239"/>
             <a:ext cx="4572000" cy="548640"/>
           </a:xfrm>
           <a:prstGeom prst="rect">
@@ -6252,8 +6596,8 @@
         </p:nvSpPr>
         <p:spPr>
           <a:xfrm>
-            <a:off x="7278624" y="2769945"/>
-            <a:ext cx="4572000" cy="2616557"/>
+            <a:off x="7278624" y="3093781"/>
+            <a:ext cx="4572000" cy="1968884"/>
           </a:xfrm>
           <a:prstGeom prst="rect">
             <a:avLst/>
@@ -6303,8 +6647,8 @@
         </p:blipFill>
         <p:spPr>
           <a:xfrm>
-            <a:off x="7223760" y="2715081"/>
-            <a:ext cx="4572000" cy="2616557"/>
+            <a:off x="7223760" y="3038917"/>
+            <a:ext cx="4572000" cy="1968884"/>
           </a:xfrm>
           <a:prstGeom prst="rect">
             <a:avLst/>

--- a/demo/05_msd_amos_spleen/presentation/demo5_external_validation.pptx
+++ b/demo/05_msd_amos_spleen/presentation/demo5_external_validation.pptx
@@ -5279,7 +5279,7 @@
                 <a:latin typeface="Inter"/>
                 <a:ea typeface="Pretendard"/>
               </a:rPr>
-              <a:t>Measured:</a:t>
+              <a:t>Measured</a:t>
             </a:r>
             <a:r>
               <a:rPr sz="2200" b="0" i="0">
@@ -5289,7 +5289,7 @@
                 <a:latin typeface="Inter"/>
                 <a:ea typeface="Pretendard"/>
               </a:rPr>
-              <a:t> ~0.28 Dice intensity domain, ~0.60 representation</a:t>
+              <a:t> on CT→MRI: 0.29 intensity, 0.59 representation</a:t>
             </a:r>
           </a:p>
           <a:p>
